--- a/reports/final/ThuyetTrinh_Airline_RNN.pptx
+++ b/reports/final/ThuyetTrinh_Airline_RNN.pptx
@@ -4352,7 +4352,7 @@
                 <a:ea typeface="Arial"/>
                 <a:cs typeface="Arial"/>
               </a:rPr>
-              <a:t>GVHD: PGS. TS. Hoàng Văn Dũng   ·   KMT26ANC</a:t>
+              <a:t>GVHD: PGS. TS. Hoàng Văn Dũng</a:t>
             </a:r>
           </a:p>
         </p:txBody>
